--- a/backend/src/main/resources/static/demo/files/sample-complex.pptx
+++ b/backend/src/main/resources/static/demo/files/sample-complex.pptx
@@ -3107,7 +3107,7 @@
           <a:lstStyle/>
           <a:p>
             <a:r>
-              <a:t>Modern Preview-Only Demo Deck</a:t>
+              <a:t>EasyPreviewer Demo Deck</a:t>
             </a:r>
           </a:p>
         </p:txBody>
